--- a/images/chap3_kb_flow_bw.pptx
+++ b/images/chap3_kb_flow_bw.pptx
@@ -5,10 +5,10 @@
     <p:sldMasterId id="2147483648" r:id="rId1"/>
   </p:sldMasterIdLst>
   <p:notesMasterIdLst>
-    <p:notesMasterId r:id="rId4"/>
+    <p:notesMasterId r:id="rId3"/>
   </p:notesMasterIdLst>
   <p:sldIdLst>
-    <p:sldId id="256" r:id="rId3"/>
+    <p:sldId id="256" r:id="rId2"/>
   </p:sldIdLst>
   <p:sldSz cx="12188825" cy="6858000"/>
   <p:notesSz cx="6858000" cy="12188825"/>
@@ -205,6 +205,7 @@
           <a:p>
             <a:fld id="{5282F153-3F37-0F45-9E97-73ACFA13230C}" type="datetimeFigureOut">
               <a:rPr lang="en-US"/>
+              <a:t>4/20/2026</a:t>
             </a:fld>
             <a:endParaRPr lang="en-US"/>
           </a:p>
@@ -271,7 +272,6 @@
               <a:rPr lang="en-US"/>
               <a:t>Click to edit Master text styles</a:t>
             </a:r>
-            <a:endParaRPr lang="en-US"/>
           </a:p>
           <a:p>
             <a:pPr lvl="1"/>
@@ -279,7 +279,6 @@
               <a:rPr lang="en-US"/>
               <a:t>Second level</a:t>
             </a:r>
-            <a:endParaRPr lang="en-US"/>
           </a:p>
           <a:p>
             <a:pPr lvl="2"/>
@@ -287,7 +286,6 @@
               <a:rPr lang="en-US"/>
               <a:t>Third level</a:t>
             </a:r>
-            <a:endParaRPr lang="en-US"/>
           </a:p>
           <a:p>
             <a:pPr lvl="3"/>
@@ -295,7 +293,6 @@
               <a:rPr lang="en-US"/>
               <a:t>Fourth level</a:t>
             </a:r>
-            <a:endParaRPr lang="en-US"/>
           </a:p>
           <a:p>
             <a:pPr lvl="4"/>
@@ -303,7 +300,6 @@
               <a:rPr lang="en-US"/>
               <a:t>Fifth level</a:t>
             </a:r>
-            <a:endParaRPr lang="en-US"/>
           </a:p>
         </p:txBody>
       </p:sp>
@@ -367,6 +363,7 @@
           <a:p>
             <a:fld id="{CE5E9CC1-C706-0F49-92D6-E571CC5EEA8F}" type="slidenum">
               <a:rPr lang="en-US"/>
+              <a:t>‹#›</a:t>
             </a:fld>
             <a:endParaRPr lang="en-US"/>
           </a:p>
@@ -535,6 +532,7 @@
           <a:p>
             <a:fld id="{F7021451-1387-4CA6-816F-3879F97B5CBC}" type="slidenum">
               <a:rPr lang="en-US"/>
+              <a:t>1</a:t>
             </a:fld>
             <a:endParaRPr lang="en-US"/>
           </a:p>
@@ -931,7 +929,10 @@
             </a:avLst>
           </a:prstGeom>
           <a:solidFill>
-            <a:srgbClr val="1F1F1F"/>
+            <a:schemeClr val="tx1">
+              <a:lumMod val="85000"/>
+              <a:lumOff val="15000"/>
+            </a:schemeClr>
           </a:solidFill>
           <a:ln w="12700">
             <a:solidFill>
@@ -949,7 +950,7 @@
         </p:nvSpPr>
         <p:spPr>
           <a:xfrm>
-            <a:off x="493776" y="429768"/>
+            <a:off x="502485" y="464604"/>
             <a:ext cx="2457418" cy="164592"/>
           </a:xfrm>
           <a:prstGeom prst="rect">
@@ -965,7 +966,7 @@
               <a:buNone/>
             </a:pPr>
             <a:r>
-              <a:rPr lang="en-US" sz="1240" b="1" dirty="0">
+              <a:rPr lang="en-US" b="1" dirty="0">
                 <a:solidFill>
                   <a:srgbClr val="FFFFFF"/>
                 </a:solidFill>
@@ -975,7 +976,7 @@
               </a:rPr>
               <a:t>① 数据采集</a:t>
             </a:r>
-            <a:endParaRPr lang="en-US" sz="1240" dirty="0"/>
+            <a:endParaRPr lang="en-US" dirty="0"/>
           </a:p>
         </p:txBody>
       </p:sp>
@@ -1040,14 +1041,6 @@
               </a:rPr>
               <a:t>CNCF Landscape 快照</a:t>
             </a:r>
-            <a:endParaRPr lang="en-US" sz="1200" b="1" dirty="0">
-              <a:solidFill>
-                <a:srgbClr val="111111"/>
-              </a:solidFill>
-              <a:latin typeface="微软雅黑" panose="020B0503020204020204" pitchFamily="34" charset="-122"/>
-              <a:ea typeface="微软雅黑" panose="020B0503020204020204" pitchFamily="34" charset="-122"/>
-              <a:cs typeface="微软雅黑" panose="020B0503020204020204" pitchFamily="34" charset="-120"/>
-            </a:endParaRPr>
           </a:p>
         </p:txBody>
       </p:sp>
@@ -1085,14 +1078,6 @@
               </a:rPr>
               <a:t>固化云原生应用清单</a:t>
             </a:r>
-            <a:endParaRPr lang="en-US" sz="990" dirty="0">
-              <a:solidFill>
-                <a:srgbClr val="5A5A5A"/>
-              </a:solidFill>
-              <a:latin typeface="微软雅黑" panose="020B0503020204020204" pitchFamily="34" charset="-122"/>
-              <a:ea typeface="微软雅黑" panose="020B0503020204020204" pitchFamily="34" charset="-122"/>
-              <a:cs typeface="微软雅黑" panose="020B0503020204020204" pitchFamily="34" charset="-120"/>
-            </a:endParaRPr>
           </a:p>
         </p:txBody>
       </p:sp>
@@ -1184,14 +1169,6 @@
               </a:rPr>
               <a:t>GitHub 仓库目标集合</a:t>
             </a:r>
-            <a:endParaRPr lang="en-US" sz="1200" b="1" dirty="0">
-              <a:solidFill>
-                <a:srgbClr val="111111"/>
-              </a:solidFill>
-              <a:latin typeface="微软雅黑" panose="020B0503020204020204" pitchFamily="34" charset="-122"/>
-              <a:ea typeface="微软雅黑" panose="020B0503020204020204" pitchFamily="34" charset="-122"/>
-              <a:cs typeface="微软雅黑" panose="020B0503020204020204" pitchFamily="34" charset="-120"/>
-            </a:endParaRPr>
           </a:p>
         </p:txBody>
       </p:sp>
@@ -1229,14 +1206,6 @@
               </a:rPr>
               <a:t>将应用条目映射到官方代码仓库</a:t>
             </a:r>
-            <a:endParaRPr lang="en-US" sz="990" dirty="0">
-              <a:solidFill>
-                <a:srgbClr val="5A5A5A"/>
-              </a:solidFill>
-              <a:latin typeface="微软雅黑" panose="020B0503020204020204" pitchFamily="34" charset="-122"/>
-              <a:ea typeface="微软雅黑" panose="020B0503020204020204" pitchFamily="34" charset="-122"/>
-              <a:cs typeface="微软雅黑" panose="020B0503020204020204" pitchFamily="34" charset="-120"/>
-            </a:endParaRPr>
           </a:p>
         </p:txBody>
       </p:sp>
@@ -1268,6 +1237,7 @@
         </p:spPr>
         <p:txBody>
           <a:bodyPr/>
+          <a:lstStyle/>
           <a:p>
             <a:endParaRPr lang="zh-CN" altLang="en-US"/>
           </a:p>
@@ -1307,14 +1277,6 @@
               </a:rPr>
               <a:t>多源漏洞检索</a:t>
             </a:r>
-            <a:endParaRPr lang="en-US" sz="1200" b="1" dirty="0">
-              <a:solidFill>
-                <a:srgbClr val="111111"/>
-              </a:solidFill>
-              <a:latin typeface="微软雅黑" panose="020B0503020204020204" pitchFamily="34" charset="-122"/>
-              <a:ea typeface="微软雅黑" panose="020B0503020204020204" pitchFamily="34" charset="-122"/>
-              <a:cs typeface="微软雅黑" panose="020B0503020204020204" pitchFamily="34" charset="-120"/>
-            </a:endParaRPr>
           </a:p>
         </p:txBody>
       </p:sp>
@@ -1553,14 +1515,6 @@
               </a:rPr>
               <a:t>围绕权限提升线索检索 Kubernetes 及其生态应用漏洞</a:t>
             </a:r>
-            <a:endParaRPr lang="en-US" sz="1000" dirty="0">
-              <a:solidFill>
-                <a:srgbClr val="5A5A5A"/>
-              </a:solidFill>
-              <a:latin typeface="微软雅黑" panose="020B0503020204020204" pitchFamily="34" charset="-122"/>
-              <a:ea typeface="微软雅黑" panose="020B0503020204020204" pitchFamily="34" charset="-122"/>
-              <a:cs typeface="微软雅黑" panose="020B0503020204020204" pitchFamily="34" charset="-120"/>
-            </a:endParaRPr>
           </a:p>
         </p:txBody>
       </p:sp>
@@ -1608,7 +1562,10 @@
             </a:avLst>
           </a:prstGeom>
           <a:solidFill>
-            <a:srgbClr val="1F1F1F"/>
+            <a:schemeClr val="tx1">
+              <a:lumMod val="85000"/>
+              <a:lumOff val="15000"/>
+            </a:schemeClr>
           </a:solidFill>
           <a:ln w="12065">
             <a:solidFill>
@@ -1652,14 +1609,6 @@
               </a:rPr>
               <a:t>CVE 候选池</a:t>
             </a:r>
-            <a:endParaRPr lang="en-US" sz="1400" b="1" dirty="0">
-              <a:solidFill>
-                <a:srgbClr val="FFFFFF"/>
-              </a:solidFill>
-              <a:latin typeface="微软雅黑" panose="020B0503020204020204" pitchFamily="34" charset="-122"/>
-              <a:ea typeface="微软雅黑" panose="020B0503020204020204" pitchFamily="34" charset="-122"/>
-              <a:cs typeface="微软雅黑" panose="020B0503020204020204" pitchFamily="34" charset="-120"/>
-            </a:endParaRPr>
           </a:p>
         </p:txBody>
       </p:sp>
@@ -1709,7 +1658,10 @@
             </a:avLst>
           </a:prstGeom>
           <a:solidFill>
-            <a:srgbClr val="353535"/>
+            <a:schemeClr val="tx1">
+              <a:lumMod val="85000"/>
+              <a:lumOff val="15000"/>
+            </a:schemeClr>
           </a:solidFill>
           <a:ln w="12700">
             <a:solidFill>
@@ -1727,7 +1679,7 @@
         </p:nvSpPr>
         <p:spPr>
           <a:xfrm>
-            <a:off x="3408394" y="429768"/>
+            <a:off x="3408394" y="464604"/>
             <a:ext cx="2457418" cy="164592"/>
           </a:xfrm>
           <a:prstGeom prst="rect">
@@ -1743,7 +1695,7 @@
               <a:buNone/>
             </a:pPr>
             <a:r>
-              <a:rPr lang="en-US" sz="1240" b="1" dirty="0">
+              <a:rPr lang="en-US" b="1" dirty="0">
                 <a:solidFill>
                   <a:srgbClr val="FFFFFF"/>
                 </a:solidFill>
@@ -1753,7 +1705,7 @@
               </a:rPr>
               <a:t>② 漏洞筛选</a:t>
             </a:r>
-            <a:endParaRPr lang="en-US" sz="1240" dirty="0"/>
+            <a:endParaRPr lang="en-US" dirty="0"/>
           </a:p>
         </p:txBody>
       </p:sp>
@@ -1818,14 +1770,6 @@
               </a:rPr>
               <a:t>关键词约束</a:t>
             </a:r>
-            <a:endParaRPr lang="en-US" sz="1200" b="1" dirty="0">
-              <a:solidFill>
-                <a:srgbClr val="111111"/>
-              </a:solidFill>
-              <a:latin typeface="微软雅黑" panose="020B0503020204020204" pitchFamily="34" charset="-122"/>
-              <a:ea typeface="微软雅黑" panose="020B0503020204020204" pitchFamily="34" charset="-122"/>
-              <a:cs typeface="微软雅黑" panose="020B0503020204020204" pitchFamily="34" charset="-120"/>
-            </a:endParaRPr>
           </a:p>
         </p:txBody>
       </p:sp>
@@ -1970,27 +1914,8 @@
                 <a:ea typeface="微软雅黑" panose="020B0503020204020204" pitchFamily="34" charset="-122"/>
                 <a:cs typeface="微软雅黑" panose="020B0503020204020204" pitchFamily="34" charset="-120"/>
               </a:rPr>
-              <a:t>严重度</a:t>
-            </a:r>
-            <a:r>
-              <a:rPr lang="zh-CN" altLang="en-US" sz="1200" b="1" dirty="0">
-                <a:solidFill>
-                  <a:srgbClr val="111111"/>
-                </a:solidFill>
-                <a:latin typeface="微软雅黑" panose="020B0503020204020204" pitchFamily="34" charset="-122"/>
-                <a:ea typeface="微软雅黑" panose="020B0503020204020204" pitchFamily="34" charset="-122"/>
-                <a:cs typeface="微软雅黑" panose="020B0503020204020204" pitchFamily="34" charset="-120"/>
-              </a:rPr>
-              <a:t>筛选</a:t>
-            </a:r>
-            <a:endParaRPr lang="zh-CN" altLang="en-US" sz="1200" b="1" dirty="0">
-              <a:solidFill>
-                <a:srgbClr val="111111"/>
-              </a:solidFill>
-              <a:latin typeface="微软雅黑" panose="020B0503020204020204" pitchFamily="34" charset="-122"/>
-              <a:ea typeface="微软雅黑" panose="020B0503020204020204" pitchFamily="34" charset="-122"/>
-              <a:cs typeface="微软雅黑" panose="020B0503020204020204" pitchFamily="34" charset="-120"/>
-            </a:endParaRPr>
+              <a:t>严重度筛选</a:t>
+            </a:r>
           </a:p>
         </p:txBody>
       </p:sp>
@@ -2039,14 +1964,6 @@
               </a:rPr>
               <a:t>CVSS ≥ 5.0</a:t>
             </a:r>
-            <a:endParaRPr lang="en-US" altLang="zh-CN" sz="1000" dirty="0">
-              <a:solidFill>
-                <a:srgbClr val="5A5A5A"/>
-              </a:solidFill>
-              <a:latin typeface="微软雅黑" panose="020B0503020204020204" pitchFamily="34" charset="-122"/>
-              <a:ea typeface="微软雅黑" panose="020B0503020204020204" pitchFamily="34" charset="-122"/>
-              <a:cs typeface="微软雅黑" panose="020B0503020204020204" pitchFamily="34" charset="-120"/>
-            </a:endParaRPr>
           </a:p>
           <a:p>
             <a:pPr marL="0" indent="0" algn="ctr">
@@ -2128,14 +2045,6 @@
               </a:rPr>
               <a:t>人工复核</a:t>
             </a:r>
-            <a:endParaRPr lang="en-US" sz="1200" b="1" dirty="0">
-              <a:solidFill>
-                <a:srgbClr val="111111"/>
-              </a:solidFill>
-              <a:latin typeface="微软雅黑" panose="020B0503020204020204" pitchFamily="34" charset="-122"/>
-              <a:ea typeface="微软雅黑" panose="020B0503020204020204" pitchFamily="34" charset="-122"/>
-              <a:cs typeface="微软雅黑" panose="020B0503020204020204" pitchFamily="34" charset="-120"/>
-            </a:endParaRPr>
           </a:p>
         </p:txBody>
       </p:sp>
@@ -2173,14 +2082,6 @@
               </a:rPr>
               <a:t>结合公告原文、厂商通告与社区讨论去重修正</a:t>
             </a:r>
-            <a:endParaRPr lang="en-US" sz="1000" dirty="0">
-              <a:solidFill>
-                <a:srgbClr val="5A5A5A"/>
-              </a:solidFill>
-              <a:latin typeface="微软雅黑" panose="020B0503020204020204" pitchFamily="34" charset="-122"/>
-              <a:ea typeface="微软雅黑" panose="020B0503020204020204" pitchFamily="34" charset="-122"/>
-              <a:cs typeface="微软雅黑" panose="020B0503020204020204" pitchFamily="34" charset="-120"/>
-            </a:endParaRPr>
           </a:p>
         </p:txBody>
       </p:sp>
@@ -2228,7 +2129,10 @@
             </a:avLst>
           </a:prstGeom>
           <a:solidFill>
-            <a:srgbClr val="353535"/>
+            <a:schemeClr val="tx1">
+              <a:lumMod val="85000"/>
+              <a:lumOff val="15000"/>
+            </a:schemeClr>
           </a:solidFill>
           <a:ln w="12065">
             <a:solidFill>
@@ -2272,14 +2176,6 @@
               </a:rPr>
               <a:t>筛选后漏洞样本集</a:t>
             </a:r>
-            <a:endParaRPr lang="en-US" sz="1400" b="1" dirty="0">
-              <a:solidFill>
-                <a:srgbClr val="FFFFFF"/>
-              </a:solidFill>
-              <a:latin typeface="微软雅黑" panose="020B0503020204020204" pitchFamily="34" charset="-122"/>
-              <a:ea typeface="微软雅黑" panose="020B0503020204020204" pitchFamily="34" charset="-122"/>
-              <a:cs typeface="微软雅黑" panose="020B0503020204020204" pitchFamily="34" charset="-120"/>
-            </a:endParaRPr>
           </a:p>
         </p:txBody>
       </p:sp>
@@ -2329,7 +2225,10 @@
             </a:avLst>
           </a:prstGeom>
           <a:solidFill>
-            <a:srgbClr val="4B4B4B"/>
+            <a:schemeClr val="tx1">
+              <a:lumMod val="85000"/>
+              <a:lumOff val="15000"/>
+            </a:schemeClr>
           </a:solidFill>
           <a:ln w="12700">
             <a:solidFill>
@@ -2338,6 +2237,13 @@
             <a:prstDash val="solid"/>
           </a:ln>
         </p:spPr>
+        <p:txBody>
+          <a:bodyPr/>
+          <a:lstStyle/>
+          <a:p>
+            <a:endParaRPr lang="zh-CN" altLang="en-US" dirty="0"/>
+          </a:p>
+        </p:txBody>
       </p:sp>
       <p:sp>
         <p:nvSpPr>
@@ -2347,7 +2253,7 @@
         </p:nvSpPr>
         <p:spPr>
           <a:xfrm>
-            <a:off x="6323012" y="429768"/>
+            <a:off x="6323012" y="464604"/>
             <a:ext cx="2457418" cy="164592"/>
           </a:xfrm>
           <a:prstGeom prst="rect">
@@ -2363,7 +2269,7 @@
               <a:buNone/>
             </a:pPr>
             <a:r>
-              <a:rPr lang="en-US" sz="1240" b="1" dirty="0">
+              <a:rPr lang="en-US" b="1" dirty="0">
                 <a:solidFill>
                   <a:srgbClr val="FFFFFF"/>
                 </a:solidFill>
@@ -2373,7 +2279,7 @@
               </a:rPr>
               <a:t>③ 漏洞分类</a:t>
             </a:r>
-            <a:endParaRPr lang="en-US" sz="1240" dirty="0"/>
+            <a:endParaRPr lang="en-US" dirty="0"/>
           </a:p>
         </p:txBody>
       </p:sp>
@@ -2438,14 +2344,6 @@
               </a:rPr>
               <a:t>CWE 标注</a:t>
             </a:r>
-            <a:endParaRPr lang="en-US" sz="1200" b="1" dirty="0">
-              <a:solidFill>
-                <a:srgbClr val="111111"/>
-              </a:solidFill>
-              <a:latin typeface="微软雅黑" panose="020B0503020204020204" pitchFamily="34" charset="-122"/>
-              <a:ea typeface="微软雅黑" panose="020B0503020204020204" pitchFamily="34" charset="-122"/>
-              <a:cs typeface="微软雅黑" panose="020B0503020204020204" pitchFamily="34" charset="-120"/>
-            </a:endParaRPr>
           </a:p>
         </p:txBody>
       </p:sp>
@@ -2483,14 +2381,6 @@
               </a:rPr>
               <a:t>提取公开映射与漏洞公告中的弱点信息</a:t>
             </a:r>
-            <a:endParaRPr lang="en-US" sz="1000" dirty="0">
-              <a:solidFill>
-                <a:srgbClr val="5A5A5A"/>
-              </a:solidFill>
-              <a:latin typeface="微软雅黑" panose="020B0503020204020204" pitchFamily="34" charset="-122"/>
-              <a:ea typeface="微软雅黑" panose="020B0503020204020204" pitchFamily="34" charset="-122"/>
-              <a:cs typeface="微软雅黑" panose="020B0503020204020204" pitchFamily="34" charset="-120"/>
-            </a:endParaRPr>
           </a:p>
         </p:txBody>
       </p:sp>
@@ -2582,14 +2472,6 @@
               </a:rPr>
               <a:t>权重归一与主导弱点判定</a:t>
             </a:r>
-            <a:endParaRPr lang="en-US" sz="1200" b="1" dirty="0">
-              <a:solidFill>
-                <a:srgbClr val="111111"/>
-              </a:solidFill>
-              <a:latin typeface="微软雅黑" panose="020B0503020204020204" pitchFamily="34" charset="-122"/>
-              <a:ea typeface="微软雅黑" panose="020B0503020204020204" pitchFamily="34" charset="-122"/>
-              <a:cs typeface="微软雅黑" panose="020B0503020204020204" pitchFamily="34" charset="-120"/>
-            </a:endParaRPr>
           </a:p>
         </p:txBody>
       </p:sp>
@@ -2627,14 +2509,6 @@
               </a:rPr>
               <a:t>缓解多标签交叉带来的标注歧义</a:t>
             </a:r>
-            <a:endParaRPr lang="en-US" sz="1000" dirty="0">
-              <a:solidFill>
-                <a:srgbClr val="5A5A5A"/>
-              </a:solidFill>
-              <a:latin typeface="微软雅黑" panose="020B0503020204020204" pitchFamily="34" charset="-122"/>
-              <a:ea typeface="微软雅黑" panose="020B0503020204020204" pitchFamily="34" charset="-122"/>
-              <a:cs typeface="微软雅黑" panose="020B0503020204020204" pitchFamily="34" charset="-120"/>
-            </a:endParaRPr>
           </a:p>
         </p:txBody>
       </p:sp>
@@ -2753,14 +2627,6 @@
               </a:rPr>
               <a:t>两级成因分类框架</a:t>
             </a:r>
-            <a:endParaRPr lang="en-US" sz="1200" b="1" dirty="0">
-              <a:solidFill>
-                <a:srgbClr val="111111"/>
-              </a:solidFill>
-              <a:latin typeface="微软雅黑" panose="020B0503020204020204" pitchFamily="34" charset="-122"/>
-              <a:ea typeface="微软雅黑" panose="020B0503020204020204" pitchFamily="34" charset="-122"/>
-              <a:cs typeface="微软雅黑" panose="020B0503020204020204" pitchFamily="34" charset="-120"/>
-            </a:endParaRPr>
           </a:p>
         </p:txBody>
       </p:sp>
@@ -2849,14 +2715,6 @@
               </a:rPr>
               <a:t>类</a:t>
             </a:r>
-            <a:endParaRPr lang="en-US" sz="1200" b="1" dirty="0">
-              <a:solidFill>
-                <a:srgbClr val="4B4B4B"/>
-              </a:solidFill>
-              <a:latin typeface="微软雅黑" panose="020B0503020204020204" pitchFamily="34" charset="-122"/>
-              <a:ea typeface="微软雅黑" panose="020B0503020204020204" pitchFamily="34" charset="-122"/>
-              <a:cs typeface="微软雅黑" panose="020B0503020204020204" pitchFamily="34" charset="-120"/>
-            </a:endParaRPr>
           </a:p>
         </p:txBody>
       </p:sp>
@@ -2955,7 +2813,10 @@
             </a:avLst>
           </a:prstGeom>
           <a:solidFill>
-            <a:srgbClr val="4B4B4B"/>
+            <a:schemeClr val="tx1">
+              <a:lumMod val="85000"/>
+              <a:lumOff val="15000"/>
+            </a:schemeClr>
           </a:solidFill>
           <a:ln w="12065">
             <a:solidFill>
@@ -2999,14 +2860,6 @@
               </a:rPr>
               <a:t>带标签漏洞样本集</a:t>
             </a:r>
-            <a:endParaRPr lang="en-US" sz="1400" b="1" dirty="0">
-              <a:solidFill>
-                <a:srgbClr val="FFFFFF"/>
-              </a:solidFill>
-              <a:latin typeface="微软雅黑" panose="020B0503020204020204" pitchFamily="34" charset="-122"/>
-              <a:ea typeface="微软雅黑" panose="020B0503020204020204" pitchFamily="34" charset="-122"/>
-              <a:cs typeface="微软雅黑" panose="020B0503020204020204" pitchFamily="34" charset="-120"/>
-            </a:endParaRPr>
           </a:p>
         </p:txBody>
       </p:sp>
@@ -3056,7 +2909,10 @@
             </a:avLst>
           </a:prstGeom>
           <a:solidFill>
-            <a:srgbClr val="666666"/>
+            <a:schemeClr val="tx1">
+              <a:lumMod val="85000"/>
+              <a:lumOff val="15000"/>
+            </a:schemeClr>
           </a:solidFill>
           <a:ln w="12700">
             <a:solidFill>
@@ -3074,7 +2930,7 @@
         </p:nvSpPr>
         <p:spPr>
           <a:xfrm>
-            <a:off x="9237631" y="429768"/>
+            <a:off x="9237631" y="464604"/>
             <a:ext cx="2457418" cy="164592"/>
           </a:xfrm>
           <a:prstGeom prst="rect">
@@ -3090,7 +2946,7 @@
               <a:buNone/>
             </a:pPr>
             <a:r>
-              <a:rPr lang="en-US" sz="1240" b="1" dirty="0">
+              <a:rPr lang="en-US" b="1" dirty="0">
                 <a:solidFill>
                   <a:srgbClr val="FFFFFF"/>
                 </a:solidFill>
@@ -3100,7 +2956,7 @@
               </a:rPr>
               <a:t>④ 知识库构建</a:t>
             </a:r>
-            <a:endParaRPr lang="en-US" sz="1240" dirty="0"/>
+            <a:endParaRPr lang="en-US" dirty="0"/>
           </a:p>
         </p:txBody>
       </p:sp>
@@ -3165,14 +3021,6 @@
               </a:rPr>
               <a:t>材料收集</a:t>
             </a:r>
-            <a:endParaRPr lang="en-US" sz="1200" b="1" dirty="0">
-              <a:solidFill>
-                <a:srgbClr val="111111"/>
-              </a:solidFill>
-              <a:latin typeface="微软雅黑" panose="020B0503020204020204" pitchFamily="34" charset="-122"/>
-              <a:ea typeface="微软雅黑" panose="020B0503020204020204" pitchFamily="34" charset="-122"/>
-              <a:cs typeface="微软雅黑" panose="020B0503020204020204" pitchFamily="34" charset="-120"/>
-            </a:endParaRPr>
           </a:p>
         </p:txBody>
       </p:sp>
@@ -3210,14 +3058,6 @@
               </a:rPr>
               <a:t>源码 / 配置 / 文档 / 公告 / Issue / PR </a:t>
             </a:r>
-            <a:endParaRPr lang="en-US" sz="1000" dirty="0">
-              <a:solidFill>
-                <a:srgbClr val="5A5A5A"/>
-              </a:solidFill>
-              <a:latin typeface="微软雅黑" panose="020B0503020204020204" pitchFamily="34" charset="-122"/>
-              <a:ea typeface="微软雅黑" panose="020B0503020204020204" pitchFamily="34" charset="-122"/>
-              <a:cs typeface="微软雅黑" panose="020B0503020204020204" pitchFamily="34" charset="-120"/>
-            </a:endParaRPr>
           </a:p>
         </p:txBody>
       </p:sp>
@@ -3309,14 +3149,6 @@
               </a:rPr>
               <a:t>文本规范化与过滤</a:t>
             </a:r>
-            <a:endParaRPr lang="en-US" sz="1200" b="1" dirty="0">
-              <a:solidFill>
-                <a:srgbClr val="111111"/>
-              </a:solidFill>
-              <a:latin typeface="微软雅黑" panose="020B0503020204020204" pitchFamily="34" charset="-122"/>
-              <a:ea typeface="微软雅黑" panose="020B0503020204020204" pitchFamily="34" charset="-122"/>
-              <a:cs typeface="微软雅黑" panose="020B0503020204020204" pitchFamily="34" charset="-120"/>
-            </a:endParaRPr>
           </a:p>
         </p:txBody>
       </p:sp>
@@ -3354,14 +3186,6 @@
               </a:rPr>
               <a:t>去除噪声并压缩无效内容，保留可复核证据</a:t>
             </a:r>
-            <a:endParaRPr lang="en-US" sz="1000" dirty="0">
-              <a:solidFill>
-                <a:srgbClr val="5A5A5A"/>
-              </a:solidFill>
-              <a:latin typeface="微软雅黑" panose="020B0503020204020204" pitchFamily="34" charset="-122"/>
-              <a:ea typeface="微软雅黑" panose="020B0503020204020204" pitchFamily="34" charset="-122"/>
-              <a:cs typeface="微软雅黑" panose="020B0503020204020204" pitchFamily="34" charset="-120"/>
-            </a:endParaRPr>
           </a:p>
         </p:txBody>
       </p:sp>
@@ -3453,14 +3277,6 @@
               </a:rPr>
               <a:t>差异化分块</a:t>
             </a:r>
-            <a:endParaRPr lang="en-US" sz="1200" b="1" dirty="0">
-              <a:solidFill>
-                <a:srgbClr val="111111"/>
-              </a:solidFill>
-              <a:latin typeface="微软雅黑" panose="020B0503020204020204" pitchFamily="34" charset="-122"/>
-              <a:ea typeface="微软雅黑" panose="020B0503020204020204" pitchFamily="34" charset="-122"/>
-              <a:cs typeface="微软雅黑" panose="020B0503020204020204" pitchFamily="34" charset="-120"/>
-            </a:endParaRPr>
           </a:p>
         </p:txBody>
       </p:sp>
@@ -3498,14 +3314,6 @@
               </a:rPr>
               <a:t>代码按行级与语义边界；文档按段落与滑动窗口</a:t>
             </a:r>
-            <a:endParaRPr lang="en-US" sz="1000" dirty="0">
-              <a:solidFill>
-                <a:srgbClr val="5A5A5A"/>
-              </a:solidFill>
-              <a:latin typeface="微软雅黑" panose="020B0503020204020204" pitchFamily="34" charset="-122"/>
-              <a:ea typeface="微软雅黑" panose="020B0503020204020204" pitchFamily="34" charset="-122"/>
-              <a:cs typeface="微软雅黑" panose="020B0503020204020204" pitchFamily="34" charset="-120"/>
-            </a:endParaRPr>
           </a:p>
         </p:txBody>
       </p:sp>
@@ -3597,14 +3405,6 @@
               </a:rPr>
               <a:t>向量化与检索索引</a:t>
             </a:r>
-            <a:endParaRPr lang="en-US" sz="1200" b="1" dirty="0">
-              <a:solidFill>
-                <a:srgbClr val="111111"/>
-              </a:solidFill>
-              <a:latin typeface="微软雅黑" panose="020B0503020204020204" pitchFamily="34" charset="-122"/>
-              <a:ea typeface="微软雅黑" panose="020B0503020204020204" pitchFamily="34" charset="-122"/>
-              <a:cs typeface="微软雅黑" panose="020B0503020204020204" pitchFamily="34" charset="-120"/>
-            </a:endParaRPr>
           </a:p>
         </p:txBody>
       </p:sp>
@@ -3642,14 +3442,6 @@
               </a:rPr>
               <a:t>MPNet 编码 + FAISS 近邻检索</a:t>
             </a:r>
-            <a:endParaRPr lang="en-US" sz="1000" dirty="0">
-              <a:solidFill>
-                <a:srgbClr val="5A5A5A"/>
-              </a:solidFill>
-              <a:latin typeface="微软雅黑" panose="020B0503020204020204" pitchFamily="34" charset="-122"/>
-              <a:ea typeface="微软雅黑" panose="020B0503020204020204" pitchFamily="34" charset="-122"/>
-              <a:cs typeface="微软雅黑" panose="020B0503020204020204" pitchFamily="34" charset="-120"/>
-            </a:endParaRPr>
           </a:p>
         </p:txBody>
       </p:sp>
@@ -3670,7 +3462,10 @@
             </a:avLst>
           </a:prstGeom>
           <a:solidFill>
-            <a:srgbClr val="666666"/>
+            <a:schemeClr val="tx1">
+              <a:lumMod val="85000"/>
+              <a:lumOff val="15000"/>
+            </a:schemeClr>
           </a:solidFill>
           <a:ln w="12065">
             <a:solidFill>
@@ -3725,14 +3520,6 @@
               </a:rPr>
               <a:t>知识库</a:t>
             </a:r>
-            <a:endParaRPr lang="en-US" sz="1400" b="1" dirty="0">
-              <a:solidFill>
-                <a:srgbClr val="FFFFFF"/>
-              </a:solidFill>
-              <a:latin typeface="微软雅黑" panose="020B0503020204020204" pitchFamily="34" charset="-122"/>
-              <a:ea typeface="微软雅黑" panose="020B0503020204020204" pitchFamily="34" charset="-122"/>
-              <a:cs typeface="微软雅黑" panose="020B0503020204020204" pitchFamily="34" charset="-120"/>
-            </a:endParaRPr>
           </a:p>
         </p:txBody>
       </p:sp>
@@ -4549,6 +4336,8 @@
       </a:bgFillStyleLst>
     </a:fmtScheme>
   </a:themeElements>
+  <a:objectDefaults/>
+  <a:extraClrSchemeLst/>
   <a:extLst>
     <a:ext uri="{05A4C25C-085E-4340-85A3-A5531E510DB2}">
       <thm15:themeFamily xmlns:thm15="http://schemas.microsoft.com/office/thememl/2012/main" name="Office Theme" id="{62F939B6-93AF-4DB8-9C6B-D6C7DFDC589F}" vid="{4A3C46E8-61CC-4603-A589-7422A47A8E4A}"/>
@@ -4808,6 +4597,8 @@
       </a:bgFillStyleLst>
     </a:fmtScheme>
   </a:themeElements>
+  <a:objectDefaults/>
+  <a:extraClrSchemeLst/>
   <a:extLst>
     <a:ext uri="{05A4C25C-085E-4340-85A3-A5531E510DB2}">
       <thm15:themeFamily xmlns:thm15="http://schemas.microsoft.com/office/thememl/2012/main" name="Office Theme" id="{62F939B6-93AF-4DB8-9C6B-D6C7DFDC589F}" vid="{4A3C46E8-61CC-4603-A589-7422A47A8E4A}"/>
